--- a/Topic_A/Exam_Practice/AT-A-L03_Writing_Workshop_Frequency_Sequencing_and_Communication.pptx
+++ b/Topic_A/Exam_Practice/AT-A-L03_Writing_Workshop_Frequency_Sequencing_and_Communication.pptx
@@ -2678,7 +2678,7 @@
                 <a:latin typeface="Cambria" pitchFamily="34" charset="0"/>
                 <a:cs typeface="Amiri" pitchFamily="2" charset="-78"/>
               </a:rPr>
-              <a:t>Writing Workshop — Frequency, Sequencing and Communication</a:t>
+              <a:t>Writing Workshop — Frequency and Communication</a:t>
             </a:r>
             <a:endParaRPr lang="en-US" sz="2650" dirty="0"/>
           </a:p>
@@ -2716,7 +2716,7 @@
                 <a:latin typeface="Amiri" pitchFamily="2" charset="-78"/>
                 <a:cs typeface="Amiri" pitchFamily="2" charset="-78"/>
               </a:rPr>
-              <a:t>وَرْشَةُ الكِتَابَةِ — التَّكْرَارُ وَالتَّرْتِيبُ وَالتَّوَاصُلُ</a:t>
+              <a:t>وَرْشَةُ الكِتَابَةِ — التَّكْرَارُ وَالتَّوَاصُلُ</a:t>
             </a:r>
             <a:endParaRPr lang="ar-SA" sz="3600" dirty="0"/>
           </a:p>

--- a/Topic_A/Exam_Practice/AT-A-L03_Writing_Workshop_Frequency_Sequencing_and_Communication.pptx
+++ b/Topic_A/Exam_Practice/AT-A-L03_Writing_Workshop_Frequency_Sequencing_and_Communication.pptx
@@ -784,7 +784,11 @@
           <a:lstStyle/>
           <a:p>
             <a:r>
-              <a:rPr lang="en-US" dirty="0"/>
+              <a:rPr lang="ar-SA" dirty="0">
+                <a:latin typeface="Amiri" pitchFamily="2" charset="-78"/>
+                <a:ea typeface="Amiri" pitchFamily="2" charset="-78"/>
+                <a:cs typeface="Amiri" pitchFamily="2" charset="-78"/>
+              </a:rPr>
               <a:t>Q3 (3 min to choose and read). Title (أ) suits Core and Develop; title (ب) suits Stretch.</a:t>
             </a:r>
             <a:endParaRPr lang="en-US" dirty="0"/>
@@ -1403,7 +1407,11 @@
           <a:lstStyle/>
           <a:p>
             <a:r>
-              <a:rPr lang="en-US" dirty="0"/>
+              <a:rPr lang="ar-SA" dirty="0">
+                <a:latin typeface="Amiri" pitchFamily="2" charset="-78"/>
+                <a:ea typeface="Amiri" pitchFamily="2" charset="-78"/>
+                <a:cs typeface="Amiri" pitchFamily="2" charset="-78"/>
+              </a:rPr>
               <a:t>WELCOME (1 min) — while students join.
 • Greet each student by name as they arrive: السَّلَامُ عَلَيْكُمْ. Take the register (Pastoral Tracker: attendance 0/1).
 • 2-MINUTE CHECK-IN (SEND training): a private chat to any student who seemed unsettled last lesson — “Are you okay today? 👍 / 👎”.
@@ -1672,7 +1680,11 @@
           <a:lstStyle/>
           <a:p>
             <a:r>
-              <a:rPr lang="en-US" dirty="0"/>
+              <a:rPr lang="ar-SA" dirty="0">
+                <a:latin typeface="Amiri" pitchFamily="2" charset="-78"/>
+                <a:ea typeface="Amiri" pitchFamily="2" charset="-78"/>
+                <a:cs typeface="Amiri" pitchFamily="2" charset="-78"/>
+              </a:rPr>
               <a:t>QUESTION 1 — FORM FILLING. About 8 minutes. Core: boxes 1–6. Develop / Stretch: all 8. Box 5 is a noun answer (التَّدْخِينُ / السَّهَرُ) — not a verb.</a:t>
             </a:r>
             <a:endParaRPr lang="en-US" dirty="0"/>
@@ -1848,7 +1860,11 @@
           <a:lstStyle/>
           <a:p>
             <a:r>
-              <a:rPr lang="en-US" dirty="0"/>
+              <a:rPr lang="ar-SA" dirty="0">
+                <a:latin typeface="Amiri" pitchFamily="2" charset="-78"/>
+                <a:ea typeface="Amiri" pitchFamily="2" charset="-78"/>
+                <a:cs typeface="Amiri" pitchFamily="2" charset="-78"/>
+              </a:rPr>
               <a:t>Q2 TASK (3 min to read and plan). Students number the four bullets 1–4 in the margin and tick each one as they write it. Writing to an aunt (feminine): أُخْبِرَكِ · إِلَيْكِ · سَأَزُورُكِ. To an uncle: أُخْبِرَكَ · إِلَيْكَ · سَأَزُورُكَ.</a:t>
             </a:r>
             <a:endParaRPr lang="en-US" dirty="0"/>
@@ -1936,7 +1952,11 @@
           <a:lstStyle/>
           <a:p>
             <a:r>
-              <a:rPr lang="en-US" dirty="0"/>
+              <a:rPr lang="ar-SA" dirty="0">
+                <a:latin typeface="Amiri" pitchFamily="2" charset="-78"/>
+                <a:ea typeface="Amiri" pitchFamily="2" charset="-78"/>
+                <a:cs typeface="Amiri" pitchFamily="2" charset="-78"/>
+              </a:rPr>
               <a:t>Question words: مَاذَا (what) · كَمْ مَرَّةً (how often) · كَيْفَ (how) — and two tenses in bullet 4: فَعَلْتَ (past) · سَتَفْعَلُ (future).</a:t>
             </a:r>
             <a:endParaRPr lang="en-US" dirty="0"/>
@@ -2508,6 +2528,7 @@
                   <a:srgbClr val="D4AF37"/>
                 </a:solidFill>
                 <a:latin typeface="Amiri" pitchFamily="2" charset="-78"/>
+                <a:ea typeface="Amiri" pitchFamily="2" charset="-78"/>
                 <a:cs typeface="Amiri" pitchFamily="2" charset="-78"/>
               </a:rPr>
               <a:t>م</a:t>
@@ -2714,6 +2735,7 @@
                   <a:srgbClr val="D4AF37"/>
                 </a:solidFill>
                 <a:latin typeface="Amiri" pitchFamily="2" charset="-78"/>
+                <a:ea typeface="Amiri" pitchFamily="2" charset="-78"/>
                 <a:cs typeface="Amiri" pitchFamily="2" charset="-78"/>
               </a:rPr>
               <a:t>وَرْشَةُ الكِتَابَةِ — التَّكْرَارُ وَالتَّوَاصُلُ</a:t>
@@ -3171,6 +3193,7 @@
                   <a:srgbClr val="D4AF37"/>
                 </a:solidFill>
                 <a:latin typeface="Amiri" pitchFamily="2" charset="-78"/>
+                <a:ea typeface="Amiri" pitchFamily="2" charset="-78"/>
                 <a:cs typeface="Amiri" pitchFamily="2" charset="-78"/>
               </a:rPr>
               <a:t>م</a:t>
@@ -3491,6 +3514,7 @@
                   <a:srgbClr val="8A6D1E"/>
                 </a:solidFill>
                 <a:latin typeface="Amiri" pitchFamily="2" charset="-78"/>
+                <a:ea typeface="Amiri" pitchFamily="2" charset="-78"/>
                 <a:cs typeface="Amiri" pitchFamily="2" charset="-78"/>
               </a:rPr>
               <a:t>نَمُوذَجُ الإِجَابَةِ</a:t>
@@ -3604,6 +3628,7 @@
                   <a:srgbClr val="1F2A37"/>
                 </a:solidFill>
                 <a:latin typeface="Amiri" pitchFamily="2" charset="-78"/>
+                <a:ea typeface="Amiri" pitchFamily="2" charset="-78"/>
                 <a:cs typeface="Amiri" pitchFamily="2" charset="-78"/>
               </a:rPr>
               <a:t>مَرْحَبًا يَا خَالَتِي،</a:t>
@@ -3623,6 +3648,7 @@
                   <a:srgbClr val="1F2A37"/>
                 </a:solidFill>
                 <a:latin typeface="Amiri" pitchFamily="2" charset="-78"/>
+                <a:ea typeface="Amiri" pitchFamily="2" charset="-78"/>
                 <a:cs typeface="Amiri" pitchFamily="2" charset="-78"/>
               </a:rPr>
               <a:t>كَيْفَ حَالُكِ؟ أُرِيدُ أَنْ أُخْبِرَكِ عَنْ أُسْبُوعِي. أَذْهَبُ إِلَى المَدْرَسَةِ كُلَّ يَوْمٍ، وَأَلْعَبُ كُرَةَ القَدَمِ مَرَّتَيْنِ فِي الأُسْبُوعِ. قَبْلَ أَنْ أَنَامَ أَقْرَأُ كِتَابًا. أَتَوَاصَلُ مَعَ أَصْدِقَائِي بِالرَّسَائِلِ كُلَّ يَوْمٍ، وَأَتَّصِلُ بِجَدَّتِي يَوْمَ الجُمُعَةِ. أَمْسِ ذَهَبْتُ إِلَى المَكْتَبَةِ بَعْدَ المَدْرَسَةِ، ثُمَّ رَجَعْتُ إِلَى البَيْتِ. فِي العُطْلَةِ سَأَزُورُكِ مَعَ أُمِّي، إِنْ شَاءَ اللّٰهُ.</a:t>
@@ -3642,6 +3668,7 @@
                   <a:srgbClr val="1F2A37"/>
                 </a:solidFill>
                 <a:latin typeface="Amiri" pitchFamily="2" charset="-78"/>
+                <a:ea typeface="Amiri" pitchFamily="2" charset="-78"/>
                 <a:cs typeface="Amiri" pitchFamily="2" charset="-78"/>
               </a:rPr>
               <a:t>مَعَ حُبِّي،</a:t>
@@ -3661,6 +3688,7 @@
                   <a:srgbClr val="1F2A37"/>
                 </a:solidFill>
                 <a:latin typeface="Amiri" pitchFamily="2" charset="-78"/>
+                <a:ea typeface="Amiri" pitchFamily="2" charset="-78"/>
                 <a:cs typeface="Amiri" pitchFamily="2" charset="-78"/>
               </a:rPr>
               <a:t>آدَمُ</a:t>
@@ -3824,11 +3852,12 @@
               <a:buNone/>
             </a:pPr>
             <a:r>
-              <a:rPr lang="en-US" sz="950" b="1" dirty="0">
+              <a:rPr lang="ar-SA" sz="950" b="1" dirty="0">
                 <a:solidFill>
                   <a:srgbClr val="FFFFFF"/>
                 </a:solidFill>
                 <a:latin typeface="Calibri" pitchFamily="34" charset="0"/>
+                <a:ea typeface="Amiri" pitchFamily="2" charset="-78"/>
                 <a:cs typeface="Amiri" pitchFamily="2" charset="-78"/>
               </a:rPr>
               <a:t>مَرَّتَيْنِ</a:t>
@@ -3889,11 +3918,12 @@
               <a:buNone/>
             </a:pPr>
             <a:r>
-              <a:rPr lang="en-US" sz="950" b="1" dirty="0">
+              <a:rPr lang="ar-SA" sz="950" b="1" dirty="0">
                 <a:solidFill>
                   <a:srgbClr val="FFFFFF"/>
                 </a:solidFill>
                 <a:latin typeface="Calibri" pitchFamily="34" charset="0"/>
+                <a:ea typeface="Amiri" pitchFamily="2" charset="-78"/>
                 <a:cs typeface="Amiri" pitchFamily="2" charset="-78"/>
               </a:rPr>
               <a:t>قَبْلَ أَنْ أَنَامَ</a:t>
@@ -3954,11 +3984,12 @@
               <a:buNone/>
             </a:pPr>
             <a:r>
-              <a:rPr lang="en-US" sz="950" b="1" dirty="0">
+              <a:rPr lang="ar-SA" sz="950" b="1" dirty="0">
                 <a:solidFill>
                   <a:srgbClr val="FFFFFF"/>
                 </a:solidFill>
                 <a:latin typeface="Calibri" pitchFamily="34" charset="0"/>
+                <a:ea typeface="Amiri" pitchFamily="2" charset="-78"/>
                 <a:cs typeface="Amiri" pitchFamily="2" charset="-78"/>
               </a:rPr>
               <a:t>أَتَوَاصَلُ</a:t>
@@ -4019,11 +4050,12 @@
               <a:buNone/>
             </a:pPr>
             <a:r>
-              <a:rPr lang="en-US" sz="950" b="1" dirty="0">
+              <a:rPr lang="ar-SA" sz="950" b="1" dirty="0">
                 <a:solidFill>
                   <a:srgbClr val="FFFFFF"/>
                 </a:solidFill>
                 <a:latin typeface="Calibri" pitchFamily="34" charset="0"/>
+                <a:ea typeface="Amiri" pitchFamily="2" charset="-78"/>
                 <a:cs typeface="Amiri" pitchFamily="2" charset="-78"/>
               </a:rPr>
               <a:t>سَأَزُورُكِ</a:t>
@@ -4157,6 +4189,7 @@
                   <a:srgbClr val="D4AF37"/>
                 </a:solidFill>
                 <a:latin typeface="Amiri" pitchFamily="2" charset="-78"/>
+                <a:ea typeface="Amiri" pitchFamily="2" charset="-78"/>
                 <a:cs typeface="Amiri" pitchFamily="2" charset="-78"/>
               </a:rPr>
               <a:t>م</a:t>
@@ -4477,6 +4510,7 @@
                   <a:srgbClr val="8A6D1E"/>
                 </a:solidFill>
                 <a:latin typeface="Amiri" pitchFamily="2" charset="-78"/>
+                <a:ea typeface="Amiri" pitchFamily="2" charset="-78"/>
                 <a:cs typeface="Amiri" pitchFamily="2" charset="-78"/>
               </a:rPr>
               <a:t>نَمُوذَجُ الإِجَابَةِ</a:t>
@@ -4590,6 +4624,7 @@
                   <a:srgbClr val="1F2A37"/>
                 </a:solidFill>
                 <a:latin typeface="Amiri" pitchFamily="2" charset="-78"/>
+                <a:ea typeface="Amiri" pitchFamily="2" charset="-78"/>
                 <a:cs typeface="Amiri" pitchFamily="2" charset="-78"/>
               </a:rPr>
               <a:t>مَرْحَبًا يَا خَالَتِي،</a:t>
@@ -4609,6 +4644,7 @@
                   <a:srgbClr val="1F2A37"/>
                 </a:solidFill>
                 <a:latin typeface="Amiri" pitchFamily="2" charset="-78"/>
+                <a:ea typeface="Amiri" pitchFamily="2" charset="-78"/>
                 <a:cs typeface="Amiri" pitchFamily="2" charset="-78"/>
               </a:rPr>
               <a:t>كَيْفَ حَالُكِ؟ أَشْتَاقُ إِلَيْكِ كَثِيرًا. أُرِيدُ أَنْ أُخْبِرَكِ عَنْ أُسْبُوعِي. أَذْهَبُ إِلَى المَدْرَسَةِ خَمْسَةَ أَيَّامٍ، وَأَلْعَبُ كُرَةَ القَدَمِ مَرَّتَيْنِ فِي الأُسْبُوعِ، وَلَا أَتَأَخَّرُ عَنِ التَّدْرِيبِ أَبَدًا. عِنْدَمَا أَرْجِعُ إِلَى البَيْتِ أُنْهِي وَاجِبَاتِي، وَقَبْلَ أَنْ أَنَامَ أَقْرَأُ قَلِيلًا. وَأَحْيَانًا أَلْعَبُ مَعَ أَخِي فِي الحَدِيقَةِ. أَتَوَاصَلُ مَعَ أَصْدِقَائِي بِالرَّسَائِلِ يَوْمِيًّا، لٰكِنَّنِي أُفَضِّلُ المُكَالَمَاتِ لِأَنَّهَا أَقْرَبُ. أَمْسِ، بَعْدَ أَنْ رَجَعْتُ مِنَ المَدْرَسَةِ، ذَهَبْتُ إِلَى المَكْتَبَةِ مَعَ صَدِيقِي يُوسُفَ وَاسْتَعَرْتُ كِتَابًا جَدِيدًا. فِي العُطْلَةِ القَادِمَةِ سَأَزُورُكِ مَعَ أُمِّي، وَسَنَقْضِي يَوْمًا كَامِلًا مَعًا.</a:t>
@@ -4628,6 +4664,7 @@
                   <a:srgbClr val="1F2A37"/>
                 </a:solidFill>
                 <a:latin typeface="Amiri" pitchFamily="2" charset="-78"/>
+                <a:ea typeface="Amiri" pitchFamily="2" charset="-78"/>
                 <a:cs typeface="Amiri" pitchFamily="2" charset="-78"/>
               </a:rPr>
               <a:t>مَعَ حُبِّي،</a:t>
@@ -4647,6 +4684,7 @@
                   <a:srgbClr val="1F2A37"/>
                 </a:solidFill>
                 <a:latin typeface="Amiri" pitchFamily="2" charset="-78"/>
+                <a:ea typeface="Amiri" pitchFamily="2" charset="-78"/>
                 <a:cs typeface="Amiri" pitchFamily="2" charset="-78"/>
               </a:rPr>
               <a:t>آدَمُ</a:t>
@@ -4810,11 +4848,12 @@
               <a:buNone/>
             </a:pPr>
             <a:r>
-              <a:rPr lang="en-US" sz="950" b="1" dirty="0">
+              <a:rPr lang="ar-SA" sz="950" b="1" dirty="0">
                 <a:solidFill>
                   <a:srgbClr val="FFFFFF"/>
                 </a:solidFill>
                 <a:latin typeface="Calibri" pitchFamily="34" charset="0"/>
+                <a:ea typeface="Amiri" pitchFamily="2" charset="-78"/>
                 <a:cs typeface="Amiri" pitchFamily="2" charset="-78"/>
               </a:rPr>
               <a:t>لَا أَتَأَخَّرُ … أَبَدًا</a:t>
@@ -4875,11 +4914,12 @@
               <a:buNone/>
             </a:pPr>
             <a:r>
-              <a:rPr lang="en-US" sz="950" b="1" dirty="0">
+              <a:rPr lang="ar-SA" sz="950" b="1" dirty="0">
                 <a:solidFill>
                   <a:srgbClr val="FFFFFF"/>
                 </a:solidFill>
                 <a:latin typeface="Calibri" pitchFamily="34" charset="0"/>
+                <a:ea typeface="Amiri" pitchFamily="2" charset="-78"/>
                 <a:cs typeface="Amiri" pitchFamily="2" charset="-78"/>
               </a:rPr>
               <a:t>عِنْدَمَا أَرْجِعُ</a:t>
@@ -4940,11 +4980,12 @@
               <a:buNone/>
             </a:pPr>
             <a:r>
-              <a:rPr lang="en-US" sz="950" b="1" dirty="0">
+              <a:rPr lang="ar-SA" sz="950" b="1" dirty="0">
                 <a:solidFill>
                   <a:srgbClr val="FFFFFF"/>
                 </a:solidFill>
                 <a:latin typeface="Calibri" pitchFamily="34" charset="0"/>
+                <a:ea typeface="Amiri" pitchFamily="2" charset="-78"/>
                 <a:cs typeface="Amiri" pitchFamily="2" charset="-78"/>
               </a:rPr>
               <a:t>لٰكِنَّنِي أُفَضِّلُ</a:t>
@@ -5005,11 +5046,12 @@
               <a:buNone/>
             </a:pPr>
             <a:r>
-              <a:rPr lang="en-US" sz="950" b="1" dirty="0">
+              <a:rPr lang="ar-SA" sz="950" b="1" dirty="0">
                 <a:solidFill>
                   <a:srgbClr val="FFFFFF"/>
                 </a:solidFill>
                 <a:latin typeface="Calibri" pitchFamily="34" charset="0"/>
+                <a:ea typeface="Amiri" pitchFamily="2" charset="-78"/>
                 <a:cs typeface="Amiri" pitchFamily="2" charset="-78"/>
               </a:rPr>
               <a:t>بَعْدَ أَنْ رَجَعْتُ</a:t>
@@ -5143,6 +5185,7 @@
                   <a:srgbClr val="D4AF37"/>
                 </a:solidFill>
                 <a:latin typeface="Amiri" pitchFamily="2" charset="-78"/>
+                <a:ea typeface="Amiri" pitchFamily="2" charset="-78"/>
                 <a:cs typeface="Amiri" pitchFamily="2" charset="-78"/>
               </a:rPr>
               <a:t>م</a:t>
@@ -5463,6 +5506,7 @@
                   <a:srgbClr val="8A6D1E"/>
                 </a:solidFill>
                 <a:latin typeface="Amiri" pitchFamily="2" charset="-78"/>
+                <a:ea typeface="Amiri" pitchFamily="2" charset="-78"/>
                 <a:cs typeface="Amiri" pitchFamily="2" charset="-78"/>
               </a:rPr>
               <a:t>اخْتَرْ عُنْوَانًا وَاحِدًا</a:t>
@@ -5743,6 +5787,7 @@
                   <a:srgbClr val="1B3B6F"/>
                 </a:solidFill>
                 <a:latin typeface="Amiri" pitchFamily="2" charset="-78"/>
+                <a:ea typeface="Amiri" pitchFamily="2" charset="-78"/>
                 <a:cs typeface="Amiri" pitchFamily="2" charset="-78"/>
               </a:rPr>
               <a:t>أُسْبُوعِي: مَاذَا أَفْعَلُ وَكَمْ مَرَّةً؟</a:t>
@@ -5781,6 +5826,7 @@
                   <a:srgbClr val="1B3B6F"/>
                 </a:solidFill>
                 <a:latin typeface="Amiri" pitchFamily="2" charset="-78"/>
+                <a:ea typeface="Amiri" pitchFamily="2" charset="-78"/>
                 <a:cs typeface="Amiri" pitchFamily="2" charset="-78"/>
               </a:rPr>
               <a:t>(أ)</a:t>
@@ -5887,6 +5933,7 @@
                   <a:srgbClr val="1B3B6F"/>
                 </a:solidFill>
                 <a:latin typeface="Amiri" pitchFamily="2" charset="-78"/>
+                <a:ea typeface="Amiri" pitchFamily="2" charset="-78"/>
                 <a:cs typeface="Amiri" pitchFamily="2" charset="-78"/>
               </a:rPr>
               <a:t>صِفْ نَشَاطَاتِكَ وَكَمْ مَرَّةً تَفْعَلُهَا · صِفْ مَا تَفْعَلُهُ بَعْدَ المَدْرَسَةِ بِالتَّرْتِيبِ · كَيْفَ تَتَوَاصَلُ مَعَ الآخَرِينَ وَمَا رَأْيُكَ؟ · مَاذَا فَعَلْتَ الأُسْبُوعَ المَاضِيَ، وَمَا خُطَطُكَ؟</a:t>
@@ -6018,6 +6065,7 @@
                   <a:srgbClr val="1B3B6F"/>
                 </a:solidFill>
                 <a:latin typeface="Amiri" pitchFamily="2" charset="-78"/>
+                <a:ea typeface="Amiri" pitchFamily="2" charset="-78"/>
                 <a:cs typeface="Amiri" pitchFamily="2" charset="-78"/>
               </a:rPr>
               <a:t>التَّوَاصُلُ بَيْنَ الأَمْسِ وَاليَوْمِ</a:t>
@@ -6056,6 +6104,7 @@
                   <a:srgbClr val="1B3B6F"/>
                 </a:solidFill>
                 <a:latin typeface="Amiri" pitchFamily="2" charset="-78"/>
+                <a:ea typeface="Amiri" pitchFamily="2" charset="-78"/>
                 <a:cs typeface="Amiri" pitchFamily="2" charset="-78"/>
               </a:rPr>
               <a:t>(ب)</a:t>
@@ -6162,6 +6211,7 @@
                   <a:srgbClr val="1B3B6F"/>
                 </a:solidFill>
                 <a:latin typeface="Amiri" pitchFamily="2" charset="-78"/>
+                <a:ea typeface="Amiri" pitchFamily="2" charset="-78"/>
                 <a:cs typeface="Amiri" pitchFamily="2" charset="-78"/>
               </a:rPr>
               <a:t>كَيْفَ كَانَ النَّاسُ يَتَوَاصَلُونَ فِي المَاضِي؟ · كَيْفَ تَتَوَاصَلُ أَنْتَ اليَوْمَ؟ · مَا إِيجَابِيَّاتُ التِّكْنُولُوجِيَا وَسَلْبِيَّاتُهَا؟ · مَاذَا سَتُغَيِّرُ فِي عَادَاتِكَ؟</a:t>
@@ -6361,6 +6411,7 @@
                   <a:srgbClr val="D4AF37"/>
                 </a:solidFill>
                 <a:latin typeface="Amiri" pitchFamily="2" charset="-78"/>
+                <a:ea typeface="Amiri" pitchFamily="2" charset="-78"/>
                 <a:cs typeface="Amiri" pitchFamily="2" charset="-78"/>
               </a:rPr>
               <a:t>م</a:t>
@@ -6681,6 +6732,7 @@
                   <a:srgbClr val="8A6D1E"/>
                 </a:solidFill>
                 <a:latin typeface="Amiri" pitchFamily="2" charset="-78"/>
+                <a:ea typeface="Amiri" pitchFamily="2" charset="-78"/>
                 <a:cs typeface="Amiri" pitchFamily="2" charset="-78"/>
               </a:rPr>
               <a:t>خُطَّةُ الكِتَابَةِ</a:t>
@@ -7305,6 +7357,7 @@
                   <a:srgbClr val="1B3B6F"/>
                 </a:solidFill>
                 <a:latin typeface="Amiri" pitchFamily="2" charset="-78"/>
+                <a:ea typeface="Amiri" pitchFamily="2" charset="-78"/>
                 <a:cs typeface="Amiri" pitchFamily="2" charset="-78"/>
               </a:rPr>
               <a:t>أَتَّصِلُ بِجَدَّتِي مَرَّةً فِي الأُسْبُوعِ.</a:t>
@@ -7404,6 +7457,7 @@
                   <a:srgbClr val="1B3B6F"/>
                 </a:solidFill>
                 <a:latin typeface="Amiri" pitchFamily="2" charset="-78"/>
+                <a:ea typeface="Amiri" pitchFamily="2" charset="-78"/>
                 <a:cs typeface="Amiri" pitchFamily="2" charset="-78"/>
               </a:rPr>
               <a:t>فِي المَاضِي كَانَ جَدِّي يَكْتُبُ رَسَائِلَ.</a:t>
@@ -7503,6 +7557,7 @@
                   <a:srgbClr val="1B3B6F"/>
                 </a:solidFill>
                 <a:latin typeface="Amiri" pitchFamily="2" charset="-78"/>
+                <a:ea typeface="Amiri" pitchFamily="2" charset="-78"/>
                 <a:cs typeface="Amiri" pitchFamily="2" charset="-78"/>
               </a:rPr>
               <a:t>سَأُطْفِئُ هَاتِفِي سَاعَةً كُلَّ مَسَاءٍ.</a:t>
@@ -7664,6 +7719,7 @@
                   <a:srgbClr val="1F2A37"/>
                 </a:solidFill>
                 <a:latin typeface="Amiri" pitchFamily="2" charset="-78"/>
+                <a:ea typeface="Amiri" pitchFamily="2" charset="-78"/>
                 <a:cs typeface="Amiri" pitchFamily="2" charset="-78"/>
               </a:rPr>
               <a:t>أ</a:t>
@@ -7690,6 +7746,7 @@
                   <a:srgbClr val="1F2A37"/>
                 </a:solidFill>
                 <a:latin typeface="Amiri" pitchFamily="2" charset="-78"/>
+                <a:ea typeface="Amiri" pitchFamily="2" charset="-78"/>
                 <a:cs typeface="Amiri" pitchFamily="2" charset="-78"/>
               </a:rPr>
               <a:t>ب</a:t>
@@ -7836,6 +7893,7 @@
                   <a:srgbClr val="D4AF37"/>
                 </a:solidFill>
                 <a:latin typeface="Amiri" pitchFamily="2" charset="-78"/>
+                <a:ea typeface="Amiri" pitchFamily="2" charset="-78"/>
                 <a:cs typeface="Amiri" pitchFamily="2" charset="-78"/>
               </a:rPr>
               <a:t>م</a:t>
@@ -8093,6 +8151,7 @@
                   <a:srgbClr val="8A6D1E"/>
                 </a:solidFill>
                 <a:latin typeface="Amiri" pitchFamily="2" charset="-78"/>
+                <a:ea typeface="Amiri" pitchFamily="2" charset="-78"/>
                 <a:cs typeface="Amiri" pitchFamily="2" charset="-78"/>
               </a:rPr>
               <a:t>أ</a:t>
@@ -8157,6 +8216,7 @@
                   <a:srgbClr val="1B3B6F"/>
                 </a:solidFill>
                 <a:latin typeface="Amiri" pitchFamily="2" charset="-78"/>
+                <a:ea typeface="Amiri" pitchFamily="2" charset="-78"/>
                 <a:cs typeface="Amiri" pitchFamily="2" charset="-78"/>
               </a:rPr>
               <a:t>أ</a:t>
@@ -8208,6 +8268,7 @@
                   <a:srgbClr val="8A6D1E"/>
                 </a:solidFill>
                 <a:latin typeface="Amiri" pitchFamily="2" charset="-78"/>
+                <a:ea typeface="Amiri" pitchFamily="2" charset="-78"/>
                 <a:cs typeface="Amiri" pitchFamily="2" charset="-78"/>
               </a:rPr>
               <a:t>نَمُوذَجُ الإِجَابَةِ</a:t>
@@ -8321,6 +8382,7 @@
                   <a:srgbClr val="1F2A37"/>
                 </a:solidFill>
                 <a:latin typeface="Amiri" pitchFamily="2" charset="-78"/>
+                <a:ea typeface="Amiri" pitchFamily="2" charset="-78"/>
                 <a:cs typeface="Amiri" pitchFamily="2" charset="-78"/>
               </a:rPr>
               <a:t>أُسْبُوعِي مُنَظَّمٌ جِدًّا. أَذْهَبُ إِلَى المَدْرَسَةِ مِنَ الإِثْنَيْنِ إِلَى الجُمُعَةِ، وَأَسْتَيْقِظُ دَائِمًا فِي السَّاعَةِ السَّادِسَةِ وَالنِّصْفِ. أَلْعَبُ كُرَةَ السَّلَّةِ مَرَّتَيْنِ فِي الأُسْبُوعِ، يَوْمَ الثُّلَاثَاءِ وَيَوْمَ الخَمِيسِ. أَحْيَانًا أَذْهَبُ إِلَى المَكْتَبَةِ بَعْدَ المَدْرَسَةِ، وَنَادِرًا مَا أُشَاهِدُ التِّلْفَازَ. وَفِي نِهَايَةِ الأُسْبُوعِ أَزُورُ جَدِّي دَائِمًا.</a:t>
@@ -8340,6 +8402,7 @@
                   <a:srgbClr val="1F2A37"/>
                 </a:solidFill>
                 <a:latin typeface="Amiri" pitchFamily="2" charset="-78"/>
+                <a:ea typeface="Amiri" pitchFamily="2" charset="-78"/>
                 <a:cs typeface="Amiri" pitchFamily="2" charset="-78"/>
               </a:rPr>
               <a:t>عِنْدَمَا أَرْجِعُ إِلَى البَيْتِ أَتَنَاوَلُ الغَدَاءَ، ثُمَّ أُنْهِي وَاجِبَاتِي. وَفِي المَسَاءِ أَتَنَاوَلُ العَشَاءَ مَعَ أُسْرَتِي. قَبْلَ أَنْ أَنَامَ أُرَتِّبُ حَقِيبَتِي وَأَقْرَأُ كِتَابًا.</a:t>
@@ -8359,6 +8422,7 @@
                   <a:srgbClr val="1F2A37"/>
                 </a:solidFill>
                 <a:latin typeface="Amiri" pitchFamily="2" charset="-78"/>
+                <a:ea typeface="Amiri" pitchFamily="2" charset="-78"/>
                 <a:cs typeface="Amiri" pitchFamily="2" charset="-78"/>
               </a:rPr>
               <a:t>أَتَوَاصَلُ مَعَ أَصْدِقَائِي بِالرَّسَائِلِ كُلَّ يَوْمٍ، وَأَتَّصِلُ بِجَدَّتِي مَرَّةً فِي الأُسْبُوعِ. وَأَحْيَانًا نَلْعَبُ مَعًا عَلَى الإِنْتَرْنِتِ. أُحِبُّ المُكَالَمَاتِ لِأَنِّي أَسْمَعُ صَوْتَ جَدَّتِي.</a:t>
@@ -8378,6 +8442,7 @@
                   <a:srgbClr val="1F2A37"/>
                 </a:solidFill>
                 <a:latin typeface="Amiri" pitchFamily="2" charset="-78"/>
+                <a:ea typeface="Amiri" pitchFamily="2" charset="-78"/>
                 <a:cs typeface="Amiri" pitchFamily="2" charset="-78"/>
               </a:rPr>
               <a:t>الأُسْبُوعَ المَاضِيَ كَانَ عِنْدِي امْتِحَانٌ فِي العُلُومِ، فَذَاكَرْتُ كُلَّ يَوْمٍ سَاعَةً، وَحَصَلْتُ عَلَى دَرَجَةٍ جَيِّدَةٍ، وَكَانَ المُعَلِّمُ سَعِيدًا جِدًّا.</a:t>
@@ -8397,6 +8462,7 @@
                   <a:srgbClr val="1F2A37"/>
                 </a:solidFill>
                 <a:latin typeface="Amiri" pitchFamily="2" charset="-78"/>
+                <a:ea typeface="Amiri" pitchFamily="2" charset="-78"/>
                 <a:cs typeface="Amiri" pitchFamily="2" charset="-78"/>
               </a:rPr>
               <a:t>فِي المُسْتَقْبَلِ سَأَلْعَبُ الرِّيَاضَةَ أَكْثَرَ، وَسَأَسْتَعْمِلُ الهَاتِفَ أَقَلَّ.</a:t>
@@ -8560,11 +8626,12 @@
               <a:buNone/>
             </a:pPr>
             <a:r>
-              <a:rPr lang="en-US" sz="950" b="1" dirty="0">
+              <a:rPr lang="ar-SA" sz="950" b="1" dirty="0">
                 <a:solidFill>
                   <a:srgbClr val="FFFFFF"/>
                 </a:solidFill>
                 <a:latin typeface="Calibri" pitchFamily="34" charset="0"/>
+                <a:ea typeface="Amiri" pitchFamily="2" charset="-78"/>
                 <a:cs typeface="Amiri" pitchFamily="2" charset="-78"/>
               </a:rPr>
               <a:t>دَائِمًا</a:t>
@@ -8625,11 +8692,12 @@
               <a:buNone/>
             </a:pPr>
             <a:r>
-              <a:rPr lang="en-US" sz="950" b="1" dirty="0">
+              <a:rPr lang="ar-SA" sz="950" b="1" dirty="0">
                 <a:solidFill>
                   <a:srgbClr val="FFFFFF"/>
                 </a:solidFill>
                 <a:latin typeface="Calibri" pitchFamily="34" charset="0"/>
+                <a:ea typeface="Amiri" pitchFamily="2" charset="-78"/>
                 <a:cs typeface="Amiri" pitchFamily="2" charset="-78"/>
               </a:rPr>
               <a:t>مَرَّتَيْنِ</a:t>
@@ -8690,11 +8758,12 @@
               <a:buNone/>
             </a:pPr>
             <a:r>
-              <a:rPr lang="en-US" sz="950" b="1" dirty="0">
+              <a:rPr lang="ar-SA" sz="950" b="1" dirty="0">
                 <a:solidFill>
                   <a:srgbClr val="FFFFFF"/>
                 </a:solidFill>
                 <a:latin typeface="Calibri" pitchFamily="34" charset="0"/>
+                <a:ea typeface="Amiri" pitchFamily="2" charset="-78"/>
                 <a:cs typeface="Amiri" pitchFamily="2" charset="-78"/>
               </a:rPr>
               <a:t>عِنْدَمَا أَرْجِعُ</a:t>
@@ -8755,11 +8824,12 @@
               <a:buNone/>
             </a:pPr>
             <a:r>
-              <a:rPr lang="en-US" sz="950" b="1" dirty="0">
+              <a:rPr lang="ar-SA" sz="950" b="1" dirty="0">
                 <a:solidFill>
                   <a:srgbClr val="FFFFFF"/>
                 </a:solidFill>
                 <a:latin typeface="Calibri" pitchFamily="34" charset="0"/>
+                <a:ea typeface="Amiri" pitchFamily="2" charset="-78"/>
                 <a:cs typeface="Amiri" pitchFamily="2" charset="-78"/>
               </a:rPr>
               <a:t>قَبْلَ أَنْ أَنَامَ</a:t>
@@ -8893,6 +8963,7 @@
                   <a:srgbClr val="D4AF37"/>
                 </a:solidFill>
                 <a:latin typeface="Amiri" pitchFamily="2" charset="-78"/>
+                <a:ea typeface="Amiri" pitchFamily="2" charset="-78"/>
                 <a:cs typeface="Amiri" pitchFamily="2" charset="-78"/>
               </a:rPr>
               <a:t>م</a:t>
@@ -9150,6 +9221,7 @@
                   <a:srgbClr val="8A6D1E"/>
                 </a:solidFill>
                 <a:latin typeface="Amiri" pitchFamily="2" charset="-78"/>
+                <a:ea typeface="Amiri" pitchFamily="2" charset="-78"/>
                 <a:cs typeface="Amiri" pitchFamily="2" charset="-78"/>
               </a:rPr>
               <a:t>أ</a:t>
@@ -9214,6 +9286,7 @@
                   <a:srgbClr val="1B3B6F"/>
                 </a:solidFill>
                 <a:latin typeface="Amiri" pitchFamily="2" charset="-78"/>
+                <a:ea typeface="Amiri" pitchFamily="2" charset="-78"/>
                 <a:cs typeface="Amiri" pitchFamily="2" charset="-78"/>
               </a:rPr>
               <a:t>أ</a:t>
@@ -9265,6 +9338,7 @@
                   <a:srgbClr val="8A6D1E"/>
                 </a:solidFill>
                 <a:latin typeface="Amiri" pitchFamily="2" charset="-78"/>
+                <a:ea typeface="Amiri" pitchFamily="2" charset="-78"/>
                 <a:cs typeface="Amiri" pitchFamily="2" charset="-78"/>
               </a:rPr>
               <a:t>نَمُوذَجُ الإِجَابَةِ</a:t>
@@ -9378,6 +9452,7 @@
                   <a:srgbClr val="1F2A37"/>
                 </a:solidFill>
                 <a:latin typeface="Amiri" pitchFamily="2" charset="-78"/>
+                <a:ea typeface="Amiri" pitchFamily="2" charset="-78"/>
                 <a:cs typeface="Amiri" pitchFamily="2" charset="-78"/>
               </a:rPr>
               <a:t>يَمُرُّ أُسْبُوعِي عَادَةً بِنِظَامٍ وَاضِحٍ. أَسْتَيْقِظُ دَائِمًا فِي السَّادِسَةِ وَالنِّصْفِ، وَقَبْلَ أَنْ أَخْرُجَ مِنَ البَيْتِ أُرَتِّبُ حَقِيبَتِي وَأَتَنَاوَلُ الإِفْطَارَ. أَتَدَرَّبُ عَلَى كُرَةِ السَّلَّةِ مَرَّتَيْنِ فِي الأُسْبُوعِ، وَأَزُورُ المَكْتَبَةَ أَحْيَانًا، أَمَّا التِّلْفَازُ فَنَادِرًا مَا أُشَاهِدُهُ. وَفِي نِهَايَةِ الأُسْبُوعِ أَقْضِي وَقْتًا أَطْوَلَ مَعَ أُسْرَتِي.</a:t>
@@ -9397,6 +9472,7 @@
                   <a:srgbClr val="1F2A37"/>
                 </a:solidFill>
                 <a:latin typeface="Amiri" pitchFamily="2" charset="-78"/>
+                <a:ea typeface="Amiri" pitchFamily="2" charset="-78"/>
                 <a:cs typeface="Amiri" pitchFamily="2" charset="-78"/>
               </a:rPr>
               <a:t>عِنْدَمَا أَرْجِعُ إِلَى البَيْتِ أَرْتَاحُ قَلِيلًا، ثُمَّ أُنْهِي وَاجِبَاتِي قَبْلَ أَنْ أَتَوَاصَلَ مَعَ أَصْدِقَائِي. أُرْسِلُ لَهُمْ رَسَائِلَ يَوْمِيًّا، لٰكِنَّنِي أَتَّصِلُ بِجَدَّتِي فِي بَاكِسْتَانَ كُلَّ يَوْمِ جُمُعَةٍ، لِأَنَّ صَوْتَهَا يُفْرِحُنِي؛ فَعِنْدَمَا أَسْمَعُهَا أَشْعُرُ أَنَّهَا قَرِيبَةٌ مِنِّي.</a:t>
@@ -9416,6 +9492,7 @@
                   <a:srgbClr val="1F2A37"/>
                 </a:solidFill>
                 <a:latin typeface="Amiri" pitchFamily="2" charset="-78"/>
+                <a:ea typeface="Amiri" pitchFamily="2" charset="-78"/>
                 <a:cs typeface="Amiri" pitchFamily="2" charset="-78"/>
               </a:rPr>
               <a:t>فِي رَأْيِي، الرَّسَائِلُ سَرِيعَةٌ وَعَمَلِيَّةٌ، غَيْرَ أَنَّ المُكَالَمَاتِ أَدْفَأُ وَأَقْرَبُ إِلَى القَلْبِ.</a:t>
@@ -9435,6 +9512,7 @@
                   <a:srgbClr val="1F2A37"/>
                 </a:solidFill>
                 <a:latin typeface="Amiri" pitchFamily="2" charset="-78"/>
+                <a:ea typeface="Amiri" pitchFamily="2" charset="-78"/>
                 <a:cs typeface="Amiri" pitchFamily="2" charset="-78"/>
               </a:rPr>
               <a:t>الأُسْبُوعَ المَاضِيَ كَانَ مُخْتَلِفًا؛ فَبَعْدَ أَنْ عَرَفْتُ مَوْعِدَ امْتِحَانِ العُلُومِ، أَطْفَأْتُ هَاتِفِي كُلَّ مَسَاءٍ وَذَاكَرْتُ سَاعَتَيْنِ، فَحَصَلْتُ عَلَى دَرَجَةٍ مُمْتَازَةٍ، وَشَعَرْتُ بِالفَخْرِ لِأَنَّ تَعَبِي لَمْ يَضِعْ.</a:t>
@@ -9454,6 +9532,7 @@
                   <a:srgbClr val="1F2A37"/>
                 </a:solidFill>
                 <a:latin typeface="Amiri" pitchFamily="2" charset="-78"/>
+                <a:ea typeface="Amiri" pitchFamily="2" charset="-78"/>
                 <a:cs typeface="Amiri" pitchFamily="2" charset="-78"/>
               </a:rPr>
               <a:t>فِي الشَّهْرِ القَادِمِ سَأُخَصِّصُ وَقْتًا ثَابِتًا لِلْقِرَاءَةِ قَبْلَ أَنْ أَنَامَ، وَلَوْ نَجَحْتُ فِي ذٰلِكَ، لَقَرَأْتُ كِتَابًا كُلَّ أُسْبُوعٍ.</a:t>
@@ -9552,11 +9631,12 @@
               <a:buNone/>
             </a:pPr>
             <a:r>
-              <a:rPr lang="en-US" sz="950" b="1" dirty="0">
+              <a:rPr lang="ar-SA" sz="950" b="1" dirty="0">
                 <a:solidFill>
                   <a:srgbClr val="FFFFFF"/>
                 </a:solidFill>
                 <a:latin typeface="Calibri" pitchFamily="34" charset="0"/>
+                <a:ea typeface="Amiri" pitchFamily="2" charset="-78"/>
                 <a:cs typeface="Amiri" pitchFamily="2" charset="-78"/>
               </a:rPr>
               <a:t>قَبْلَ أَنْ أَخْرُجَ</a:t>
@@ -9617,11 +9697,12 @@
               <a:buNone/>
             </a:pPr>
             <a:r>
-              <a:rPr lang="en-US" sz="950" b="1" dirty="0">
+              <a:rPr lang="ar-SA" sz="950" b="1" dirty="0">
                 <a:solidFill>
                   <a:srgbClr val="FFFFFF"/>
                 </a:solidFill>
                 <a:latin typeface="Calibri" pitchFamily="34" charset="0"/>
+                <a:ea typeface="Amiri" pitchFamily="2" charset="-78"/>
                 <a:cs typeface="Amiri" pitchFamily="2" charset="-78"/>
               </a:rPr>
               <a:t>أَمَّا التِّلْفَازُ فَنَادِرًا</a:t>
@@ -9682,11 +9763,12 @@
               <a:buNone/>
             </a:pPr>
             <a:r>
-              <a:rPr lang="en-US" sz="950" b="1" dirty="0">
+              <a:rPr lang="ar-SA" sz="950" b="1" dirty="0">
                 <a:solidFill>
                   <a:srgbClr val="FFFFFF"/>
                 </a:solidFill>
                 <a:latin typeface="Calibri" pitchFamily="34" charset="0"/>
+                <a:ea typeface="Amiri" pitchFamily="2" charset="-78"/>
                 <a:cs typeface="Amiri" pitchFamily="2" charset="-78"/>
               </a:rPr>
               <a:t>غَيْرَ أَنَّ</a:t>
@@ -9747,11 +9829,12 @@
               <a:buNone/>
             </a:pPr>
             <a:r>
-              <a:rPr lang="en-US" sz="950" b="1" dirty="0">
+              <a:rPr lang="ar-SA" sz="950" b="1" dirty="0">
                 <a:solidFill>
                   <a:srgbClr val="FFFFFF"/>
                 </a:solidFill>
                 <a:latin typeface="Calibri" pitchFamily="34" charset="0"/>
+                <a:ea typeface="Amiri" pitchFamily="2" charset="-78"/>
                 <a:cs typeface="Amiri" pitchFamily="2" charset="-78"/>
               </a:rPr>
               <a:t>لَوْ … لَقَرَأْتُ</a:t>
@@ -9885,6 +9968,7 @@
                   <a:srgbClr val="D4AF37"/>
                 </a:solidFill>
                 <a:latin typeface="Amiri" pitchFamily="2" charset="-78"/>
+                <a:ea typeface="Amiri" pitchFamily="2" charset="-78"/>
                 <a:cs typeface="Amiri" pitchFamily="2" charset="-78"/>
               </a:rPr>
               <a:t>م</a:t>
@@ -10142,6 +10226,7 @@
                   <a:srgbClr val="8A6D1E"/>
                 </a:solidFill>
                 <a:latin typeface="Amiri" pitchFamily="2" charset="-78"/>
+                <a:ea typeface="Amiri" pitchFamily="2" charset="-78"/>
                 <a:cs typeface="Amiri" pitchFamily="2" charset="-78"/>
               </a:rPr>
               <a:t>ب</a:t>
@@ -10206,6 +10291,7 @@
                   <a:srgbClr val="1B3B6F"/>
                 </a:solidFill>
                 <a:latin typeface="Amiri" pitchFamily="2" charset="-78"/>
+                <a:ea typeface="Amiri" pitchFamily="2" charset="-78"/>
                 <a:cs typeface="Amiri" pitchFamily="2" charset="-78"/>
               </a:rPr>
               <a:t>ب</a:t>
@@ -10257,6 +10343,7 @@
                   <a:srgbClr val="8A6D1E"/>
                 </a:solidFill>
                 <a:latin typeface="Amiri" pitchFamily="2" charset="-78"/>
+                <a:ea typeface="Amiri" pitchFamily="2" charset="-78"/>
                 <a:cs typeface="Amiri" pitchFamily="2" charset="-78"/>
               </a:rPr>
               <a:t>نَمُوذَجُ الإِجَابَةِ</a:t>
@@ -10370,6 +10457,7 @@
                   <a:srgbClr val="1F2A37"/>
                 </a:solidFill>
                 <a:latin typeface="Amiri" pitchFamily="2" charset="-78"/>
+                <a:ea typeface="Amiri" pitchFamily="2" charset="-78"/>
                 <a:cs typeface="Amiri" pitchFamily="2" charset="-78"/>
               </a:rPr>
               <a:t>تَغَيَّرَ التَّوَاصُلُ بَيْنَ النَّاسِ كَثِيرًا فِي السَّنَوَاتِ الأَخِيرَةِ. فِي المَاضِي كَانَ جَدِّي يَكْتُبُ رِسَالَةً وَرَقِيَّةً إِلَى أَخِيهِ مَرَّةً فِي الشَّهْرِ، وَيَنْتَظِرُ الرَّدَّ أَسَابِيعَ، فَكَانَتْ كُلُّ رِسَالَةٍ حَدَثًا مُهِمًّا فِي البَيْتِ، أَمَّا اليَوْمَ فَنُرْسِلُ الرَّسَائِلَ وَنَسْتَقْبِلُهَا فِي ثَوَانٍ.</a:t>
@@ -10389,6 +10477,7 @@
                   <a:srgbClr val="1F2A37"/>
                 </a:solidFill>
                 <a:latin typeface="Amiri" pitchFamily="2" charset="-78"/>
+                <a:ea typeface="Amiri" pitchFamily="2" charset="-78"/>
                 <a:cs typeface="Amiri" pitchFamily="2" charset="-78"/>
               </a:rPr>
               <a:t>أَنَا أَتَوَاصَلُ مَعَ أَصْدِقَائِي يَوْمِيًّا بِالتَّطْبِيقَاتِ، وَأَتَّصِلُ بِأَقَارِبِي بِالفِيدْيُو فِي المُنَاسَبَاتِ. فِي العِيدِ المَاضِي، مَثَلًا، اتَّصَلْنَا بِعَمِّي فِي كَنَدَا، فَرَأَيْنَا أَطْفَالَهُ وَتَحَدَّثْنَا سَاعَةً كَامِلَةً. وَأَحْيَانًا أَكْتُبُ بِطَاقَاتٍ وَرَقِيَّةً فِي المُنَاسَبَاتِ الكَبِيرَةِ، لِأَنَّ جَدَّتِي تُحِبُّهَا.</a:t>
@@ -10408,6 +10497,7 @@
                   <a:srgbClr val="1F2A37"/>
                 </a:solidFill>
                 <a:latin typeface="Amiri" pitchFamily="2" charset="-78"/>
+                <a:ea typeface="Amiri" pitchFamily="2" charset="-78"/>
                 <a:cs typeface="Amiri" pitchFamily="2" charset="-78"/>
               </a:rPr>
               <a:t>صَحِيحٌ أَنَّ التِّكْنُولُوجِيَا قَرَّبَتِ البَعِيدَ، غَيْرَ أَنَّهَا أَبْعَدَتِ القَرِيبَ أَحْيَانًا؛ فَكَثِيرًا مَا نَجْلِسُ مَعًا فِي غُرْفَةٍ وَاحِدَةٍ وَكُلُّ وَاحِدٍ يَنْظُرُ إِلَى هَاتِفِهِ، وَلَا نَتَحَدَّثُ إِلَّا قَلِيلًا.</a:t>
@@ -10427,6 +10517,7 @@
                   <a:srgbClr val="1F2A37"/>
                 </a:solidFill>
                 <a:latin typeface="Amiri" pitchFamily="2" charset="-78"/>
+                <a:ea typeface="Amiri" pitchFamily="2" charset="-78"/>
                 <a:cs typeface="Amiri" pitchFamily="2" charset="-78"/>
               </a:rPr>
               <a:t>لِذٰلِكَ قَرَّرْتُ أَنْ أُطْفِئَ هَاتِفِي سَاعَةً كُلَّ مَسَاءٍ، وَأَنْ أَتَحَدَّثَ مَعَ أُسْرَتِي وَأَلْعَبَ مَعَ إِخْوَتِي بَدَلًا مِنْهُ. وَلَوْ فَعَلَ كُلُّ النَّاسِ ذٰلِكَ، لَأَصْبَحَتْ عَلَاقَاتُنَا أَقْوَى وَأَجْمَلَ بِكَثِيرٍ. وَأَنْتُمْ، كَمْ سَاعَةً تَقْضُونَ عَلَى هَوَاتِفِكُمْ؟</a:t>
@@ -10525,11 +10616,12 @@
               <a:buNone/>
             </a:pPr>
             <a:r>
-              <a:rPr lang="en-US" sz="950" b="1" dirty="0">
+              <a:rPr lang="ar-SA" sz="950" b="1" dirty="0">
                 <a:solidFill>
                   <a:srgbClr val="FFFFFF"/>
                 </a:solidFill>
                 <a:latin typeface="Calibri" pitchFamily="34" charset="0"/>
+                <a:ea typeface="Amiri" pitchFamily="2" charset="-78"/>
                 <a:cs typeface="Amiri" pitchFamily="2" charset="-78"/>
               </a:rPr>
               <a:t>كَانَ جَدِّي يَكْتُبُ</a:t>
@@ -10590,11 +10682,12 @@
               <a:buNone/>
             </a:pPr>
             <a:r>
-              <a:rPr lang="en-US" sz="950" b="1" dirty="0">
+              <a:rPr lang="ar-SA" sz="950" b="1" dirty="0">
                 <a:solidFill>
                   <a:srgbClr val="FFFFFF"/>
                 </a:solidFill>
                 <a:latin typeface="Calibri" pitchFamily="34" charset="0"/>
+                <a:ea typeface="Amiri" pitchFamily="2" charset="-78"/>
                 <a:cs typeface="Amiri" pitchFamily="2" charset="-78"/>
               </a:rPr>
               <a:t>أَمَّا اليَوْمَ فَنُرْسِلُ</a:t>
@@ -10655,11 +10748,12 @@
               <a:buNone/>
             </a:pPr>
             <a:r>
-              <a:rPr lang="en-US" sz="950" b="1" dirty="0">
+              <a:rPr lang="ar-SA" sz="950" b="1" dirty="0">
                 <a:solidFill>
                   <a:srgbClr val="FFFFFF"/>
                 </a:solidFill>
                 <a:latin typeface="Calibri" pitchFamily="34" charset="0"/>
+                <a:ea typeface="Amiri" pitchFamily="2" charset="-78"/>
                 <a:cs typeface="Amiri" pitchFamily="2" charset="-78"/>
               </a:rPr>
               <a:t>صَحِيحٌ أَنَّ … غَيْرَ أَنَّهَا</a:t>
@@ -10720,11 +10814,12 @@
               <a:buNone/>
             </a:pPr>
             <a:r>
-              <a:rPr lang="en-US" sz="950" b="1" dirty="0">
+              <a:rPr lang="ar-SA" sz="950" b="1" dirty="0">
                 <a:solidFill>
                   <a:srgbClr val="FFFFFF"/>
                 </a:solidFill>
                 <a:latin typeface="Calibri" pitchFamily="34" charset="0"/>
+                <a:ea typeface="Amiri" pitchFamily="2" charset="-78"/>
                 <a:cs typeface="Amiri" pitchFamily="2" charset="-78"/>
               </a:rPr>
               <a:t>لَوْ … لَأَصْبَحَتْ</a:t>
@@ -10858,6 +10953,7 @@
                   <a:srgbClr val="D4AF37"/>
                 </a:solidFill>
                 <a:latin typeface="Amiri" pitchFamily="2" charset="-78"/>
+                <a:ea typeface="Amiri" pitchFamily="2" charset="-78"/>
                 <a:cs typeface="Amiri" pitchFamily="2" charset="-78"/>
               </a:rPr>
               <a:t>م</a:t>
@@ -11178,6 +11274,7 @@
                   <a:srgbClr val="8A6D1E"/>
                 </a:solidFill>
                 <a:latin typeface="Amiri" pitchFamily="2" charset="-78"/>
+                <a:ea typeface="Amiri" pitchFamily="2" charset="-78"/>
                 <a:cs typeface="Amiri" pitchFamily="2" charset="-78"/>
               </a:rPr>
               <a:t>قَيِّمْ عَمَلَكَ</a:t>
@@ -12422,6 +12519,7 @@
                   <a:srgbClr val="FFFFFF"/>
                 </a:solidFill>
                 <a:latin typeface="Amiri" pitchFamily="2" charset="-78"/>
+                <a:ea typeface="Amiri" pitchFamily="2" charset="-78"/>
                 <a:cs typeface="Amiri" pitchFamily="2" charset="-78"/>
               </a:rPr>
               <a:t>أَحْسَنْتُمْ! إِلَى اللِّقَاءِ</a:t>
@@ -12574,6 +12672,7 @@
                   <a:srgbClr val="D4AF37"/>
                 </a:solidFill>
                 <a:latin typeface="Amiri" pitchFamily="2" charset="-78"/>
+                <a:ea typeface="Amiri" pitchFamily="2" charset="-78"/>
                 <a:cs typeface="Amiri" pitchFamily="2" charset="-78"/>
               </a:rPr>
               <a:t>وَرْشَةُ التَّدْرِيبِ</a:t>
@@ -12707,6 +12806,7 @@
                   <a:srgbClr val="D4AF37"/>
                 </a:solidFill>
                 <a:latin typeface="Amiri" pitchFamily="2" charset="-78"/>
+                <a:ea typeface="Amiri" pitchFamily="2" charset="-78"/>
                 <a:cs typeface="Amiri" pitchFamily="2" charset="-78"/>
               </a:rPr>
               <a:t>م</a:t>
@@ -13027,6 +13127,7 @@
                   <a:srgbClr val="8A6D1E"/>
                 </a:solidFill>
                 <a:latin typeface="Amiri" pitchFamily="2" charset="-78"/>
+                <a:ea typeface="Amiri" pitchFamily="2" charset="-78"/>
                 <a:cs typeface="Amiri" pitchFamily="2" charset="-78"/>
               </a:rPr>
               <a:t>آدَابُ الصَّفِّ</a:t>
@@ -14558,6 +14659,7 @@
                   <a:srgbClr val="D4AF37"/>
                 </a:solidFill>
                 <a:latin typeface="Amiri" pitchFamily="2" charset="-78"/>
+                <a:ea typeface="Amiri" pitchFamily="2" charset="-78"/>
                 <a:cs typeface="Amiri" pitchFamily="2" charset="-78"/>
               </a:rPr>
               <a:t>م</a:t>
@@ -14878,6 +14980,7 @@
                   <a:srgbClr val="8A6D1E"/>
                 </a:solidFill>
                 <a:latin typeface="Amiri" pitchFamily="2" charset="-78"/>
+                <a:ea typeface="Amiri" pitchFamily="2" charset="-78"/>
                 <a:cs typeface="Amiri" pitchFamily="2" charset="-78"/>
               </a:rPr>
               <a:t>خَرِيطَةُ الوَرْشَةِ</a:t>
@@ -15192,6 +15295,7 @@
                   <a:srgbClr val="1B3B6F"/>
                 </a:solidFill>
                 <a:latin typeface="Amiri" pitchFamily="2" charset="-78"/>
+                <a:ea typeface="Amiri" pitchFamily="2" charset="-78"/>
                 <a:cs typeface="Amiri" pitchFamily="2" charset="-78"/>
               </a:rPr>
               <a:t>كَيْفَ</a:t>
@@ -15468,6 +15572,7 @@
                   <a:srgbClr val="1E6B52"/>
                 </a:solidFill>
                 <a:latin typeface="Amiri" pitchFamily="2" charset="-78"/>
+                <a:ea typeface="Amiri" pitchFamily="2" charset="-78"/>
                 <a:cs typeface="Amiri" pitchFamily="2" charset="-78"/>
               </a:rPr>
               <a:t>الاسْتِمَارَةُ</a:t>
@@ -15744,6 +15849,7 @@
                   <a:srgbClr val="1E6B52"/>
                 </a:solidFill>
                 <a:latin typeface="Amiri" pitchFamily="2" charset="-78"/>
+                <a:ea typeface="Amiri" pitchFamily="2" charset="-78"/>
                 <a:cs typeface="Amiri" pitchFamily="2" charset="-78"/>
               </a:rPr>
               <a:t>الرِّسَالَةُ</a:t>
@@ -16020,6 +16126,7 @@
                   <a:srgbClr val="1E6B52"/>
                 </a:solidFill>
                 <a:latin typeface="Amiri" pitchFamily="2" charset="-78"/>
+                <a:ea typeface="Amiri" pitchFamily="2" charset="-78"/>
                 <a:cs typeface="Amiri" pitchFamily="2" charset="-78"/>
               </a:rPr>
               <a:t>المَقَالُ</a:t>
@@ -16296,6 +16403,7 @@
                   <a:srgbClr val="8A6D1E"/>
                 </a:solidFill>
                 <a:latin typeface="Amiri" pitchFamily="2" charset="-78"/>
+                <a:ea typeface="Amiri" pitchFamily="2" charset="-78"/>
                 <a:cs typeface="Amiri" pitchFamily="2" charset="-78"/>
               </a:rPr>
               <a:t>قَيِّمْ</a:t>
@@ -16539,6 +16647,7 @@
                   <a:srgbClr val="D4AF37"/>
                 </a:solidFill>
                 <a:latin typeface="Amiri" pitchFamily="2" charset="-78"/>
+                <a:ea typeface="Amiri" pitchFamily="2" charset="-78"/>
                 <a:cs typeface="Amiri" pitchFamily="2" charset="-78"/>
               </a:rPr>
               <a:t>م</a:t>
@@ -16859,6 +16968,7 @@
                   <a:srgbClr val="8A6D1E"/>
                 </a:solidFill>
                 <a:latin typeface="Amiri" pitchFamily="2" charset="-78"/>
+                <a:ea typeface="Amiri" pitchFamily="2" charset="-78"/>
                 <a:cs typeface="Amiri" pitchFamily="2" charset="-78"/>
               </a:rPr>
               <a:t>امْتِحَانُ الكِتَابَةِ</a:t>
@@ -17483,6 +17593,7 @@
                   <a:srgbClr val="1B3B6F"/>
                 </a:solidFill>
                 <a:latin typeface="Amiri" pitchFamily="2" charset="-78"/>
+                <a:ea typeface="Amiri" pitchFamily="2" charset="-78"/>
                 <a:cs typeface="Amiri" pitchFamily="2" charset="-78"/>
               </a:rPr>
               <a:t>دَائِمًا · أَحْيَانًا · لَا … أَبَدًا</a:t>
@@ -17582,6 +17693,7 @@
                   <a:srgbClr val="1B3B6F"/>
                 </a:solidFill>
                 <a:latin typeface="Amiri" pitchFamily="2" charset="-78"/>
+                <a:ea typeface="Amiri" pitchFamily="2" charset="-78"/>
                 <a:cs typeface="Amiri" pitchFamily="2" charset="-78"/>
               </a:rPr>
               <a:t>قَبْلَ أَنْ أَنَامَ · بَعْدَ أَنْ رَجَعْتُ</a:t>
@@ -17681,6 +17793,7 @@
                   <a:srgbClr val="1B3B6F"/>
                 </a:solidFill>
                 <a:latin typeface="Amiri" pitchFamily="2" charset="-78"/>
+                <a:ea typeface="Amiri" pitchFamily="2" charset="-78"/>
                 <a:cs typeface="Amiri" pitchFamily="2" charset="-78"/>
               </a:rPr>
               <a:t>عِنْدَمَا · ثُمَّ · أَمَّا … فَإِنَّ</a:t>
@@ -17852,6 +17965,7 @@
                   <a:srgbClr val="D4AF37"/>
                 </a:solidFill>
                 <a:latin typeface="Amiri" pitchFamily="2" charset="-78"/>
+                <a:ea typeface="Amiri" pitchFamily="2" charset="-78"/>
                 <a:cs typeface="Amiri" pitchFamily="2" charset="-78"/>
               </a:rPr>
               <a:t>م</a:t>
@@ -18172,6 +18286,7 @@
                   <a:srgbClr val="8A6D1E"/>
                 </a:solidFill>
                 <a:latin typeface="Amiri" pitchFamily="2" charset="-78"/>
+                <a:ea typeface="Amiri" pitchFamily="2" charset="-78"/>
                 <a:cs typeface="Amiri" pitchFamily="2" charset="-78"/>
               </a:rPr>
               <a:t>اسْتِبْيَانُ نَادِي الشَّبَابِ</a:t>
@@ -18528,6 +18643,7 @@
                   <a:srgbClr val="1B3B6F"/>
                 </a:solidFill>
                 <a:latin typeface="Amiri" pitchFamily="2" charset="-78"/>
+                <a:ea typeface="Amiri" pitchFamily="2" charset="-78"/>
                 <a:cs typeface="Amiri" pitchFamily="2" charset="-78"/>
               </a:rPr>
               <a:t>الاسْمُ</a:t>
@@ -18772,6 +18888,7 @@
                   <a:srgbClr val="1B3B6F"/>
                 </a:solidFill>
                 <a:latin typeface="Amiri" pitchFamily="2" charset="-78"/>
+                <a:ea typeface="Amiri" pitchFamily="2" charset="-78"/>
                 <a:cs typeface="Amiri" pitchFamily="2" charset="-78"/>
               </a:rPr>
               <a:t>العُمْرُ</a:t>
@@ -19016,6 +19133,7 @@
                   <a:srgbClr val="1B3B6F"/>
                 </a:solidFill>
                 <a:latin typeface="Amiri" pitchFamily="2" charset="-78"/>
+                <a:ea typeface="Amiri" pitchFamily="2" charset="-78"/>
                 <a:cs typeface="Amiri" pitchFamily="2" charset="-78"/>
               </a:rPr>
               <a:t>كَمْ مَرَّةً تُمَارِسُ الرِّيَاضَةَ؟</a:t>
@@ -19260,6 +19378,7 @@
                   <a:srgbClr val="1B3B6F"/>
                 </a:solidFill>
                 <a:latin typeface="Amiri" pitchFamily="2" charset="-78"/>
+                <a:ea typeface="Amiri" pitchFamily="2" charset="-78"/>
                 <a:cs typeface="Amiri" pitchFamily="2" charset="-78"/>
               </a:rPr>
               <a:t>نَشَاطٌ تَفْعَلُهُ أَحْيَانًا</a:t>
@@ -19504,6 +19623,7 @@
                   <a:srgbClr val="1B3B6F"/>
                 </a:solidFill>
                 <a:latin typeface="Amiri" pitchFamily="2" charset="-78"/>
+                <a:ea typeface="Amiri" pitchFamily="2" charset="-78"/>
                 <a:cs typeface="Amiri" pitchFamily="2" charset="-78"/>
               </a:rPr>
               <a:t>شَيْءٌ لَا تَفْعَلُهُ أَبَدًا</a:t>
@@ -19748,6 +19868,7 @@
                   <a:srgbClr val="1B3B6F"/>
                 </a:solidFill>
                 <a:latin typeface="Amiri" pitchFamily="2" charset="-78"/>
+                <a:ea typeface="Amiri" pitchFamily="2" charset="-78"/>
                 <a:cs typeface="Amiri" pitchFamily="2" charset="-78"/>
               </a:rPr>
               <a:t>كَيْفَ تَتَوَاصَلُ مَعَ أَصْدِقَائِكَ؟</a:t>
@@ -19992,6 +20113,7 @@
                   <a:srgbClr val="1B3B6F"/>
                 </a:solidFill>
                 <a:latin typeface="Amiri" pitchFamily="2" charset="-78"/>
+                <a:ea typeface="Amiri" pitchFamily="2" charset="-78"/>
                 <a:cs typeface="Amiri" pitchFamily="2" charset="-78"/>
               </a:rPr>
               <a:t>مَتَى تَأْتِي إِلَى النَّادِي؟</a:t>
@@ -20171,6 +20293,7 @@
                   <a:srgbClr val="1B3B6F"/>
                 </a:solidFill>
                 <a:latin typeface="Amiri" pitchFamily="2" charset="-78"/>
+                <a:ea typeface="Amiri" pitchFamily="2" charset="-78"/>
                 <a:cs typeface="Amiri" pitchFamily="2" charset="-78"/>
               </a:rPr>
               <a:t>جُمْلَةٌ: مَاذَا تَفْعَلُ قَبْلَ أَنْ تَنَامَ؟</a:t>
@@ -20380,6 +20503,7 @@
                   <a:srgbClr val="D4AF37"/>
                 </a:solidFill>
                 <a:latin typeface="Amiri" pitchFamily="2" charset="-78"/>
+                <a:ea typeface="Amiri" pitchFamily="2" charset="-78"/>
                 <a:cs typeface="Amiri" pitchFamily="2" charset="-78"/>
               </a:rPr>
               <a:t>م</a:t>
@@ -20700,6 +20824,7 @@
                   <a:srgbClr val="8A6D1E"/>
                 </a:solidFill>
                 <a:latin typeface="Amiri" pitchFamily="2" charset="-78"/>
+                <a:ea typeface="Amiri" pitchFamily="2" charset="-78"/>
                 <a:cs typeface="Amiri" pitchFamily="2" charset="-78"/>
               </a:rPr>
               <a:t>نَمُوذَجُ الإِجَابَةِ</a:t>
@@ -21018,6 +21143,7 @@
                   <a:srgbClr val="1B3B6F"/>
                 </a:solidFill>
                 <a:latin typeface="Amiri" pitchFamily="2" charset="-78"/>
+                <a:ea typeface="Amiri" pitchFamily="2" charset="-78"/>
                 <a:cs typeface="Amiri" pitchFamily="2" charset="-78"/>
               </a:rPr>
               <a:t>آدَمُ حُسَيْنٌ</a:t>
@@ -21056,6 +21182,7 @@
                   <a:srgbClr val="1B3B6F"/>
                 </a:solidFill>
                 <a:latin typeface="Amiri" pitchFamily="2" charset="-78"/>
+                <a:ea typeface="Amiri" pitchFamily="2" charset="-78"/>
                 <a:cs typeface="Amiri" pitchFamily="2" charset="-78"/>
               </a:rPr>
               <a:t>الاسْمُ</a:t>
@@ -21197,6 +21324,7 @@
                   <a:srgbClr val="1B3B6F"/>
                 </a:solidFill>
                 <a:latin typeface="Amiri" pitchFamily="2" charset="-78"/>
+                <a:ea typeface="Amiri" pitchFamily="2" charset="-78"/>
                 <a:cs typeface="Amiri" pitchFamily="2" charset="-78"/>
               </a:rPr>
               <a:t>أَرْبَعَ عَشْرَةَ سَنَةً</a:t>
@@ -21235,6 +21363,7 @@
                   <a:srgbClr val="1B3B6F"/>
                 </a:solidFill>
                 <a:latin typeface="Amiri" pitchFamily="2" charset="-78"/>
+                <a:ea typeface="Amiri" pitchFamily="2" charset="-78"/>
                 <a:cs typeface="Amiri" pitchFamily="2" charset="-78"/>
               </a:rPr>
               <a:t>العُمْرُ</a:t>
@@ -21376,6 +21505,7 @@
                   <a:srgbClr val="1B3B6F"/>
                 </a:solidFill>
                 <a:latin typeface="Amiri" pitchFamily="2" charset="-78"/>
+                <a:ea typeface="Amiri" pitchFamily="2" charset="-78"/>
                 <a:cs typeface="Amiri" pitchFamily="2" charset="-78"/>
               </a:rPr>
               <a:t>ثَلَاثَ مَرَّاتٍ فِي الأُسْبُوعِ</a:t>
@@ -21414,6 +21544,7 @@
                   <a:srgbClr val="1B3B6F"/>
                 </a:solidFill>
                 <a:latin typeface="Amiri" pitchFamily="2" charset="-78"/>
+                <a:ea typeface="Amiri" pitchFamily="2" charset="-78"/>
                 <a:cs typeface="Amiri" pitchFamily="2" charset="-78"/>
               </a:rPr>
               <a:t>كَمْ مَرَّةً تُمَارِسُ الرِّيَاضَةَ؟</a:t>
@@ -21555,6 +21686,7 @@
                   <a:srgbClr val="1B3B6F"/>
                 </a:solidFill>
                 <a:latin typeface="Amiri" pitchFamily="2" charset="-78"/>
+                <a:ea typeface="Amiri" pitchFamily="2" charset="-78"/>
                 <a:cs typeface="Amiri" pitchFamily="2" charset="-78"/>
               </a:rPr>
               <a:t>الرَّسْمُ</a:t>
@@ -21593,6 +21725,7 @@
                   <a:srgbClr val="1B3B6F"/>
                 </a:solidFill>
                 <a:latin typeface="Amiri" pitchFamily="2" charset="-78"/>
+                <a:ea typeface="Amiri" pitchFamily="2" charset="-78"/>
                 <a:cs typeface="Amiri" pitchFamily="2" charset="-78"/>
               </a:rPr>
               <a:t>نَشَاطٌ تَفْعَلُهُ أَحْيَانًا</a:t>
@@ -21734,6 +21867,7 @@
                   <a:srgbClr val="1B3B6F"/>
                 </a:solidFill>
                 <a:latin typeface="Amiri" pitchFamily="2" charset="-78"/>
+                <a:ea typeface="Amiri" pitchFamily="2" charset="-78"/>
                 <a:cs typeface="Amiri" pitchFamily="2" charset="-78"/>
               </a:rPr>
               <a:t>التَّدْخِينُ</a:t>
@@ -21772,6 +21906,7 @@
                   <a:srgbClr val="1B3B6F"/>
                 </a:solidFill>
                 <a:latin typeface="Amiri" pitchFamily="2" charset="-78"/>
+                <a:ea typeface="Amiri" pitchFamily="2" charset="-78"/>
                 <a:cs typeface="Amiri" pitchFamily="2" charset="-78"/>
               </a:rPr>
               <a:t>شَيْءٌ لَا تَفْعَلُهُ أَبَدًا</a:t>
@@ -21913,6 +22048,7 @@
                   <a:srgbClr val="1B3B6F"/>
                 </a:solidFill>
                 <a:latin typeface="Amiri" pitchFamily="2" charset="-78"/>
+                <a:ea typeface="Amiri" pitchFamily="2" charset="-78"/>
                 <a:cs typeface="Amiri" pitchFamily="2" charset="-78"/>
               </a:rPr>
               <a:t>بِالرَّسَائِلِ عَلَى الهَاتِفِ</a:t>
@@ -21951,6 +22087,7 @@
                   <a:srgbClr val="1B3B6F"/>
                 </a:solidFill>
                 <a:latin typeface="Amiri" pitchFamily="2" charset="-78"/>
+                <a:ea typeface="Amiri" pitchFamily="2" charset="-78"/>
                 <a:cs typeface="Amiri" pitchFamily="2" charset="-78"/>
               </a:rPr>
               <a:t>كَيْفَ تَتَوَاصَلُ مَعَ أَصْدِقَائِكَ؟</a:t>
@@ -22092,6 +22229,7 @@
                   <a:srgbClr val="1B3B6F"/>
                 </a:solidFill>
                 <a:latin typeface="Amiri" pitchFamily="2" charset="-78"/>
+                <a:ea typeface="Amiri" pitchFamily="2" charset="-78"/>
                 <a:cs typeface="Amiri" pitchFamily="2" charset="-78"/>
               </a:rPr>
               <a:t>يَوْمَ الأَرْبِعَاءِ بَعْدَ المَدْرَسَةِ</a:t>
@@ -22130,6 +22268,7 @@
                   <a:srgbClr val="1B3B6F"/>
                 </a:solidFill>
                 <a:latin typeface="Amiri" pitchFamily="2" charset="-78"/>
+                <a:ea typeface="Amiri" pitchFamily="2" charset="-78"/>
                 <a:cs typeface="Amiri" pitchFamily="2" charset="-78"/>
               </a:rPr>
               <a:t>مَتَى تَأْتِي إِلَى النَّادِي؟</a:t>
@@ -22271,6 +22410,7 @@
                   <a:srgbClr val="1B3B6F"/>
                 </a:solidFill>
                 <a:latin typeface="Amiri" pitchFamily="2" charset="-78"/>
+                <a:ea typeface="Amiri" pitchFamily="2" charset="-78"/>
                 <a:cs typeface="Amiri" pitchFamily="2" charset="-78"/>
               </a:rPr>
               <a:t>قَبْلَ أَنْ أَنَامَ أَقْرَأُ كِتَابًا وَأُطْفِئُ هَاتِفِي.</a:t>
@@ -22309,6 +22449,7 @@
                   <a:srgbClr val="1B3B6F"/>
                 </a:solidFill>
                 <a:latin typeface="Amiri" pitchFamily="2" charset="-78"/>
+                <a:ea typeface="Amiri" pitchFamily="2" charset="-78"/>
                 <a:cs typeface="Amiri" pitchFamily="2" charset="-78"/>
               </a:rPr>
               <a:t>جُمْلَةٌ: مَاذَا تَفْعَلُ قَبْلَ أَنْ تَنَامَ؟</a:t>
@@ -22518,6 +22659,7 @@
                   <a:srgbClr val="D4AF37"/>
                 </a:solidFill>
                 <a:latin typeface="Amiri" pitchFamily="2" charset="-78"/>
+                <a:ea typeface="Amiri" pitchFamily="2" charset="-78"/>
                 <a:cs typeface="Amiri" pitchFamily="2" charset="-78"/>
               </a:rPr>
               <a:t>م</a:t>
@@ -22838,6 +22980,7 @@
                   <a:srgbClr val="8A6D1E"/>
                 </a:solidFill>
                 <a:latin typeface="Amiri" pitchFamily="2" charset="-78"/>
+                <a:ea typeface="Amiri" pitchFamily="2" charset="-78"/>
                 <a:cs typeface="Amiri" pitchFamily="2" charset="-78"/>
               </a:rPr>
               <a:t>رِسَالَةٌ إِلَى خَالَتِي</a:t>
@@ -23313,6 +23456,7 @@
                   <a:srgbClr val="1B3B6F"/>
                 </a:solidFill>
                 <a:latin typeface="Amiri" pitchFamily="2" charset="-78"/>
+                <a:ea typeface="Amiri" pitchFamily="2" charset="-78"/>
                 <a:cs typeface="Amiri" pitchFamily="2" charset="-78"/>
               </a:rPr>
               <a:t>أَشْتَاقُ إِلَيْكِ كَثِيرًا.</a:t>
@@ -23389,6 +23533,7 @@
                   <a:srgbClr val="1B3B6F"/>
                 </a:solidFill>
                 <a:latin typeface="Amiri" pitchFamily="2" charset="-78"/>
+                <a:ea typeface="Amiri" pitchFamily="2" charset="-78"/>
                 <a:cs typeface="Amiri" pitchFamily="2" charset="-78"/>
               </a:rPr>
               <a:t>مَرَّتَيْنِ فِي الأُسْبُوعِ</a:t>
@@ -23465,6 +23610,7 @@
                   <a:srgbClr val="1B3B6F"/>
                 </a:solidFill>
                 <a:latin typeface="Amiri" pitchFamily="2" charset="-78"/>
+                <a:ea typeface="Amiri" pitchFamily="2" charset="-78"/>
                 <a:cs typeface="Amiri" pitchFamily="2" charset="-78"/>
               </a:rPr>
               <a:t>عِنْدَمَا أَرْجِعُ إِلَى البَيْتِ …</a:t>
@@ -23541,6 +23687,7 @@
                   <a:srgbClr val="1B3B6F"/>
                 </a:solidFill>
                 <a:latin typeface="Amiri" pitchFamily="2" charset="-78"/>
+                <a:ea typeface="Amiri" pitchFamily="2" charset="-78"/>
                 <a:cs typeface="Amiri" pitchFamily="2" charset="-78"/>
               </a:rPr>
               <a:t>مَعَ حُبِّي،</a:t>
@@ -23712,6 +23859,7 @@
                   <a:srgbClr val="D4AF37"/>
                 </a:solidFill>
                 <a:latin typeface="Amiri" pitchFamily="2" charset="-78"/>
+                <a:ea typeface="Amiri" pitchFamily="2" charset="-78"/>
                 <a:cs typeface="Amiri" pitchFamily="2" charset="-78"/>
               </a:rPr>
               <a:t>م</a:t>
@@ -24032,6 +24180,7 @@
                   <a:srgbClr val="8A6D1E"/>
                 </a:solidFill>
                 <a:latin typeface="Amiri" pitchFamily="2" charset="-78"/>
+                <a:ea typeface="Amiri" pitchFamily="2" charset="-78"/>
                 <a:cs typeface="Amiri" pitchFamily="2" charset="-78"/>
               </a:rPr>
               <a:t>نَصُّ السُّؤَالِ</a:t>
@@ -24312,6 +24461,7 @@
                   <a:srgbClr val="1B3B6F"/>
                 </a:solidFill>
                 <a:latin typeface="Amiri" pitchFamily="2" charset="-78"/>
+                <a:ea typeface="Amiri" pitchFamily="2" charset="-78"/>
                 <a:cs typeface="Amiri" pitchFamily="2" charset="-78"/>
               </a:rPr>
               <a:t>اكْتُبْ رِسَالَةً إِلِكْتِرُونِيَّةً إِلَى قَرِيبٍ يَسْكُنُ فِي الخَارِجِ عَنْ أُسْبُوعِكَ (٨٠–٩٠ كَلِمَةً).</a:t>
@@ -24453,6 +24603,7 @@
                   <a:srgbClr val="1B3B6F"/>
                 </a:solidFill>
                 <a:latin typeface="Amiri" pitchFamily="2" charset="-78"/>
+                <a:ea typeface="Amiri" pitchFamily="2" charset="-78"/>
                 <a:cs typeface="Amiri" pitchFamily="2" charset="-78"/>
               </a:rPr>
               <a:t>مَاذَا تَفْعَلُ بِانْتِظَامٍ؟ وَكَمْ مَرَّةً؟</a:t>
@@ -24594,6 +24745,7 @@
                   <a:srgbClr val="1B3B6F"/>
                 </a:solidFill>
                 <a:latin typeface="Amiri" pitchFamily="2" charset="-78"/>
+                <a:ea typeface="Amiri" pitchFamily="2" charset="-78"/>
                 <a:cs typeface="Amiri" pitchFamily="2" charset="-78"/>
               </a:rPr>
               <a:t>مَاذَا تَفْعَلُ قَبْلَ المَدْرَسَةِ أَوْ بَعْدَهَا؟</a:t>
@@ -24735,6 +24887,7 @@
                   <a:srgbClr val="1B3B6F"/>
                 </a:solidFill>
                 <a:latin typeface="Amiri" pitchFamily="2" charset="-78"/>
+                <a:ea typeface="Amiri" pitchFamily="2" charset="-78"/>
                 <a:cs typeface="Amiri" pitchFamily="2" charset="-78"/>
               </a:rPr>
               <a:t>كَيْفَ تَتَوَاصَلُ مَعَ أَصْدِقَائِكَ وَأُسْرَتِكَ؟</a:t>
@@ -24876,6 +25029,7 @@
                   <a:srgbClr val="1B3B6F"/>
                 </a:solidFill>
                 <a:latin typeface="Amiri" pitchFamily="2" charset="-78"/>
+                <a:ea typeface="Amiri" pitchFamily="2" charset="-78"/>
                 <a:cs typeface="Amiri" pitchFamily="2" charset="-78"/>
               </a:rPr>
               <a:t>مَاذَا فَعَلْتَ أَمْسِ، وَمَاذَا سَتَفْعَلُ فِي العُطْلَةِ؟</a:t>
@@ -25085,6 +25239,7 @@
                   <a:srgbClr val="D4AF37"/>
                 </a:solidFill>
                 <a:latin typeface="Amiri" pitchFamily="2" charset="-78"/>
+                <a:ea typeface="Amiri" pitchFamily="2" charset="-78"/>
                 <a:cs typeface="Amiri" pitchFamily="2" charset="-78"/>
               </a:rPr>
               <a:t>م</a:t>
@@ -25405,6 +25560,7 @@
                   <a:srgbClr val="8A6D1E"/>
                 </a:solidFill>
                 <a:latin typeface="Amiri" pitchFamily="2" charset="-78"/>
+                <a:ea typeface="Amiri" pitchFamily="2" charset="-78"/>
                 <a:cs typeface="Amiri" pitchFamily="2" charset="-78"/>
               </a:rPr>
               <a:t>قَوَالِبُ الكِتَابَةِ</a:t>
@@ -25685,6 +25841,7 @@
                   <a:srgbClr val="1B3B6F"/>
                 </a:solidFill>
                 <a:latin typeface="Amiri" pitchFamily="2" charset="-78"/>
+                <a:ea typeface="Amiri" pitchFamily="2" charset="-78"/>
                 <a:cs typeface="Amiri" pitchFamily="2" charset="-78"/>
               </a:rPr>
               <a:t>مَرْحَبًا يَا ______ ، كَيْفَ حَالُكِ؟</a:t>
@@ -25891,6 +26048,7 @@
                   <a:srgbClr val="1B3B6F"/>
                 </a:solidFill>
                 <a:latin typeface="Amiri" pitchFamily="2" charset="-78"/>
+                <a:ea typeface="Amiri" pitchFamily="2" charset="-78"/>
                 <a:cs typeface="Amiri" pitchFamily="2" charset="-78"/>
               </a:rPr>
               <a:t>أَلْعَبُ ______ مَرَّتَيْنِ فِي الأُسْبُوعِ، وَأَحْيَانًا ______ .</a:t>
@@ -26097,6 +26255,7 @@
                   <a:srgbClr val="1B3B6F"/>
                 </a:solidFill>
                 <a:latin typeface="Amiri" pitchFamily="2" charset="-78"/>
+                <a:ea typeface="Amiri" pitchFamily="2" charset="-78"/>
                 <a:cs typeface="Amiri" pitchFamily="2" charset="-78"/>
               </a:rPr>
               <a:t>قَبْلَ أَنْ أَنَامَ ______ . عِنْدَمَا أَرْجِعُ ______ .</a:t>
@@ -26303,6 +26462,7 @@
                   <a:srgbClr val="1B3B6F"/>
                 </a:solidFill>
                 <a:latin typeface="Amiri" pitchFamily="2" charset="-78"/>
+                <a:ea typeface="Amiri" pitchFamily="2" charset="-78"/>
                 <a:cs typeface="Amiri" pitchFamily="2" charset="-78"/>
               </a:rPr>
               <a:t>أَتَوَاصَلُ مَعَ أَصْدِقَائِي بِالرَّسَائِلِ ______ .</a:t>
@@ -26509,6 +26669,7 @@
                   <a:srgbClr val="1B3B6F"/>
                 </a:solidFill>
                 <a:latin typeface="Amiri" pitchFamily="2" charset="-78"/>
+                <a:ea typeface="Amiri" pitchFamily="2" charset="-78"/>
                 <a:cs typeface="Amiri" pitchFamily="2" charset="-78"/>
               </a:rPr>
               <a:t>أَمْسِ ______ . فِي العُطْلَةِ سَوْفَ ______ .</a:t>
@@ -26715,6 +26876,7 @@
                   <a:srgbClr val="1B3B6F"/>
                 </a:solidFill>
                 <a:latin typeface="Amiri" pitchFamily="2" charset="-78"/>
+                <a:ea typeface="Amiri" pitchFamily="2" charset="-78"/>
                 <a:cs typeface="Amiri" pitchFamily="2" charset="-78"/>
               </a:rPr>
               <a:t>مَعَ حُبِّي، ______</a:t>
@@ -26954,13 +27116,9 @@
     <a:fontScheme name="Office">
       <a:majorFont>
         <a:latin typeface="Calibri Light" panose="020F0302020204030204"/>
-        <a:ea typeface=""/>
-        <a:cs typeface=""/>
-        <a:font script="Jpan" typeface="游ゴシック Light"/>
-        <a:font script="Hang" typeface="맑은 고딕"/>
-        <a:font script="Hans" typeface="等线 Light"/>
-        <a:font script="Hant" typeface="新細明體"/>
-        <a:font script="Arab" typeface="Times New Roman"/>
+        <a:ea typeface="Amiri" pitchFamily="2" charset="-78"/>
+        <a:cs typeface="Amiri" pitchFamily="2" charset="-78"/>
+        <a:font script="Arab" typeface="Amiri"/>
         <a:font script="Hebr" typeface="Times New Roman"/>
         <a:font script="Thai" typeface="Angsana New"/>
         <a:font script="Ethi" typeface="Nyala"/>
@@ -27006,13 +27164,9 @@
       </a:majorFont>
       <a:minorFont>
         <a:latin typeface="Calibri" panose="020F0502020204030204"/>
-        <a:ea typeface=""/>
-        <a:cs typeface=""/>
-        <a:font script="Jpan" typeface="游ゴシック"/>
-        <a:font script="Hang" typeface="맑은 고딕"/>
-        <a:font script="Hans" typeface="等线"/>
-        <a:font script="Hant" typeface="新細明體"/>
-        <a:font script="Arab" typeface="Arial"/>
+        <a:ea typeface="Amiri" pitchFamily="2" charset="-78"/>
+        <a:cs typeface="Amiri" pitchFamily="2" charset="-78"/>
+        <a:font script="Arab" typeface="Amiri"/>
         <a:font script="Hebr" typeface="Arial"/>
         <a:font script="Thai" typeface="Cordia New"/>
         <a:font script="Ethi" typeface="Nyala"/>

--- a/Topic_A/Exam_Practice/AT-A-L03_Writing_Workshop_Frequency_Sequencing_and_Communication.pptx
+++ b/Topic_A/Exam_Practice/AT-A-L03_Writing_Workshop_Frequency_Sequencing_and_Communication.pptx
@@ -3856,7 +3856,7 @@
                 <a:solidFill>
                   <a:srgbClr val="FFFFFF"/>
                 </a:solidFill>
-                <a:latin typeface="Calibri" pitchFamily="34" charset="0"/>
+                <a:latin typeface="Amiri" pitchFamily="2" charset="-78"/>
                 <a:ea typeface="Amiri" pitchFamily="2" charset="-78"/>
                 <a:cs typeface="Amiri" pitchFamily="2" charset="-78"/>
               </a:rPr>
@@ -3922,7 +3922,7 @@
                 <a:solidFill>
                   <a:srgbClr val="FFFFFF"/>
                 </a:solidFill>
-                <a:latin typeface="Calibri" pitchFamily="34" charset="0"/>
+                <a:latin typeface="Amiri" pitchFamily="2" charset="-78"/>
                 <a:ea typeface="Amiri" pitchFamily="2" charset="-78"/>
                 <a:cs typeface="Amiri" pitchFamily="2" charset="-78"/>
               </a:rPr>
@@ -3988,7 +3988,7 @@
                 <a:solidFill>
                   <a:srgbClr val="FFFFFF"/>
                 </a:solidFill>
-                <a:latin typeface="Calibri" pitchFamily="34" charset="0"/>
+                <a:latin typeface="Amiri" pitchFamily="2" charset="-78"/>
                 <a:ea typeface="Amiri" pitchFamily="2" charset="-78"/>
                 <a:cs typeface="Amiri" pitchFamily="2" charset="-78"/>
               </a:rPr>
@@ -4054,7 +4054,7 @@
                 <a:solidFill>
                   <a:srgbClr val="FFFFFF"/>
                 </a:solidFill>
-                <a:latin typeface="Calibri" pitchFamily="34" charset="0"/>
+                <a:latin typeface="Amiri" pitchFamily="2" charset="-78"/>
                 <a:ea typeface="Amiri" pitchFamily="2" charset="-78"/>
                 <a:cs typeface="Amiri" pitchFamily="2" charset="-78"/>
               </a:rPr>
@@ -4852,7 +4852,7 @@
                 <a:solidFill>
                   <a:srgbClr val="FFFFFF"/>
                 </a:solidFill>
-                <a:latin typeface="Calibri" pitchFamily="34" charset="0"/>
+                <a:latin typeface="Amiri" pitchFamily="2" charset="-78"/>
                 <a:ea typeface="Amiri" pitchFamily="2" charset="-78"/>
                 <a:cs typeface="Amiri" pitchFamily="2" charset="-78"/>
               </a:rPr>
@@ -4918,7 +4918,7 @@
                 <a:solidFill>
                   <a:srgbClr val="FFFFFF"/>
                 </a:solidFill>
-                <a:latin typeface="Calibri" pitchFamily="34" charset="0"/>
+                <a:latin typeface="Amiri" pitchFamily="2" charset="-78"/>
                 <a:ea typeface="Amiri" pitchFamily="2" charset="-78"/>
                 <a:cs typeface="Amiri" pitchFamily="2" charset="-78"/>
               </a:rPr>
@@ -4984,7 +4984,7 @@
                 <a:solidFill>
                   <a:srgbClr val="FFFFFF"/>
                 </a:solidFill>
-                <a:latin typeface="Calibri" pitchFamily="34" charset="0"/>
+                <a:latin typeface="Amiri" pitchFamily="2" charset="-78"/>
                 <a:ea typeface="Amiri" pitchFamily="2" charset="-78"/>
                 <a:cs typeface="Amiri" pitchFamily="2" charset="-78"/>
               </a:rPr>
@@ -5050,7 +5050,7 @@
                 <a:solidFill>
                   <a:srgbClr val="FFFFFF"/>
                 </a:solidFill>
-                <a:latin typeface="Calibri" pitchFamily="34" charset="0"/>
+                <a:latin typeface="Amiri" pitchFamily="2" charset="-78"/>
                 <a:ea typeface="Amiri" pitchFamily="2" charset="-78"/>
                 <a:cs typeface="Amiri" pitchFamily="2" charset="-78"/>
               </a:rPr>
@@ -8630,7 +8630,7 @@
                 <a:solidFill>
                   <a:srgbClr val="FFFFFF"/>
                 </a:solidFill>
-                <a:latin typeface="Calibri" pitchFamily="34" charset="0"/>
+                <a:latin typeface="Amiri" pitchFamily="2" charset="-78"/>
                 <a:ea typeface="Amiri" pitchFamily="2" charset="-78"/>
                 <a:cs typeface="Amiri" pitchFamily="2" charset="-78"/>
               </a:rPr>
@@ -8696,7 +8696,7 @@
                 <a:solidFill>
                   <a:srgbClr val="FFFFFF"/>
                 </a:solidFill>
-                <a:latin typeface="Calibri" pitchFamily="34" charset="0"/>
+                <a:latin typeface="Amiri" pitchFamily="2" charset="-78"/>
                 <a:ea typeface="Amiri" pitchFamily="2" charset="-78"/>
                 <a:cs typeface="Amiri" pitchFamily="2" charset="-78"/>
               </a:rPr>
@@ -8762,7 +8762,7 @@
                 <a:solidFill>
                   <a:srgbClr val="FFFFFF"/>
                 </a:solidFill>
-                <a:latin typeface="Calibri" pitchFamily="34" charset="0"/>
+                <a:latin typeface="Amiri" pitchFamily="2" charset="-78"/>
                 <a:ea typeface="Amiri" pitchFamily="2" charset="-78"/>
                 <a:cs typeface="Amiri" pitchFamily="2" charset="-78"/>
               </a:rPr>
@@ -8828,7 +8828,7 @@
                 <a:solidFill>
                   <a:srgbClr val="FFFFFF"/>
                 </a:solidFill>
-                <a:latin typeface="Calibri" pitchFamily="34" charset="0"/>
+                <a:latin typeface="Amiri" pitchFamily="2" charset="-78"/>
                 <a:ea typeface="Amiri" pitchFamily="2" charset="-78"/>
                 <a:cs typeface="Amiri" pitchFamily="2" charset="-78"/>
               </a:rPr>
@@ -9635,7 +9635,7 @@
                 <a:solidFill>
                   <a:srgbClr val="FFFFFF"/>
                 </a:solidFill>
-                <a:latin typeface="Calibri" pitchFamily="34" charset="0"/>
+                <a:latin typeface="Amiri" pitchFamily="2" charset="-78"/>
                 <a:ea typeface="Amiri" pitchFamily="2" charset="-78"/>
                 <a:cs typeface="Amiri" pitchFamily="2" charset="-78"/>
               </a:rPr>
@@ -9701,7 +9701,7 @@
                 <a:solidFill>
                   <a:srgbClr val="FFFFFF"/>
                 </a:solidFill>
-                <a:latin typeface="Calibri" pitchFamily="34" charset="0"/>
+                <a:latin typeface="Amiri" pitchFamily="2" charset="-78"/>
                 <a:ea typeface="Amiri" pitchFamily="2" charset="-78"/>
                 <a:cs typeface="Amiri" pitchFamily="2" charset="-78"/>
               </a:rPr>
@@ -9767,7 +9767,7 @@
                 <a:solidFill>
                   <a:srgbClr val="FFFFFF"/>
                 </a:solidFill>
-                <a:latin typeface="Calibri" pitchFamily="34" charset="0"/>
+                <a:latin typeface="Amiri" pitchFamily="2" charset="-78"/>
                 <a:ea typeface="Amiri" pitchFamily="2" charset="-78"/>
                 <a:cs typeface="Amiri" pitchFamily="2" charset="-78"/>
               </a:rPr>
@@ -9833,7 +9833,7 @@
                 <a:solidFill>
                   <a:srgbClr val="FFFFFF"/>
                 </a:solidFill>
-                <a:latin typeface="Calibri" pitchFamily="34" charset="0"/>
+                <a:latin typeface="Amiri" pitchFamily="2" charset="-78"/>
                 <a:ea typeface="Amiri" pitchFamily="2" charset="-78"/>
                 <a:cs typeface="Amiri" pitchFamily="2" charset="-78"/>
               </a:rPr>
@@ -10620,7 +10620,7 @@
                 <a:solidFill>
                   <a:srgbClr val="FFFFFF"/>
                 </a:solidFill>
-                <a:latin typeface="Calibri" pitchFamily="34" charset="0"/>
+                <a:latin typeface="Amiri" pitchFamily="2" charset="-78"/>
                 <a:ea typeface="Amiri" pitchFamily="2" charset="-78"/>
                 <a:cs typeface="Amiri" pitchFamily="2" charset="-78"/>
               </a:rPr>
@@ -10686,7 +10686,7 @@
                 <a:solidFill>
                   <a:srgbClr val="FFFFFF"/>
                 </a:solidFill>
-                <a:latin typeface="Calibri" pitchFamily="34" charset="0"/>
+                <a:latin typeface="Amiri" pitchFamily="2" charset="-78"/>
                 <a:ea typeface="Amiri" pitchFamily="2" charset="-78"/>
                 <a:cs typeface="Amiri" pitchFamily="2" charset="-78"/>
               </a:rPr>
@@ -10752,7 +10752,7 @@
                 <a:solidFill>
                   <a:srgbClr val="FFFFFF"/>
                 </a:solidFill>
-                <a:latin typeface="Calibri" pitchFamily="34" charset="0"/>
+                <a:latin typeface="Amiri" pitchFamily="2" charset="-78"/>
                 <a:ea typeface="Amiri" pitchFamily="2" charset="-78"/>
                 <a:cs typeface="Amiri" pitchFamily="2" charset="-78"/>
               </a:rPr>
@@ -10818,7 +10818,7 @@
                 <a:solidFill>
                   <a:srgbClr val="FFFFFF"/>
                 </a:solidFill>
-                <a:latin typeface="Calibri" pitchFamily="34" charset="0"/>
+                <a:latin typeface="Amiri" pitchFamily="2" charset="-78"/>
                 <a:ea typeface="Amiri" pitchFamily="2" charset="-78"/>
                 <a:cs typeface="Amiri" pitchFamily="2" charset="-78"/>
               </a:rPr>
